--- a/slides/slides-short.pptx
+++ b/slides/slides-short.pptx
@@ -7819,7 +7819,7 @@
         </p:nvSpPr>
         <p:spPr>
           <a:xfrm rot="0">
-            <a:off x="14099104" y="6230894"/>
+            <a:off x="14176464" y="5502842"/>
             <a:ext cx="2537022" cy="523875"/>
           </a:xfrm>
           <a:prstGeom prst="rect">
@@ -7929,7 +7929,7 @@
         </p:nvSpPr>
         <p:spPr>
           <a:xfrm flipH="true" flipV="false" rot="0">
-            <a:off x="14898501" y="5239073"/>
+            <a:off x="14975862" y="4511021"/>
             <a:ext cx="938226" cy="963246"/>
           </a:xfrm>
           <a:custGeom>
@@ -7941,7 +7941,7 @@
             <a:pathLst>
               <a:path h="963246" w="938226">
                 <a:moveTo>
-                  <a:pt x="938227" y="0"/>
+                  <a:pt x="938226" y="0"/>
                 </a:moveTo>
                 <a:lnTo>
                   <a:pt x="0" y="0"/>
@@ -7950,10 +7950,10 @@
                   <a:pt x="0" y="963246"/>
                 </a:lnTo>
                 <a:lnTo>
-                  <a:pt x="938227" y="963246"/>
-                </a:lnTo>
-                <a:lnTo>
-                  <a:pt x="938227" y="0"/>
+                  <a:pt x="938226" y="963246"/>
+                </a:lnTo>
+                <a:lnTo>
+                  <a:pt x="938226" y="0"/>
                 </a:lnTo>
                 <a:close/>
               </a:path>
@@ -9718,7 +9718,7 @@
         </p:nvSpPr>
         <p:spPr>
           <a:xfrm flipH="false" flipV="false" rot="0">
-            <a:off x="10498151" y="3737225"/>
+            <a:off x="10624837" y="3466632"/>
             <a:ext cx="6301966" cy="3917722"/>
           </a:xfrm>
           <a:custGeom>
@@ -9733,10 +9733,10 @@
                   <a:pt x="0" y="0"/>
                 </a:moveTo>
                 <a:lnTo>
-                  <a:pt x="6301966" y="0"/>
-                </a:lnTo>
-                <a:lnTo>
-                  <a:pt x="6301966" y="3917723"/>
+                  <a:pt x="6301967" y="0"/>
+                </a:lnTo>
+                <a:lnTo>
+                  <a:pt x="6301967" y="3917723"/>
                 </a:lnTo>
                 <a:lnTo>
                   <a:pt x="0" y="3917723"/>
@@ -9846,8 +9846,8 @@
         </p:nvSpPr>
         <p:spPr>
           <a:xfrm rot="0">
-            <a:off x="2458560" y="3837086"/>
-            <a:ext cx="6505099" cy="1057275"/>
+            <a:off x="1607030" y="3960707"/>
+            <a:ext cx="7680801" cy="976630"/>
           </a:xfrm>
           <a:prstGeom prst="rect">
             <a:avLst/>
@@ -9861,14 +9861,14 @@
           <a:p>
             <a:pPr algn="l">
               <a:lnSpc>
-                <a:spcPts val="4200"/>
+                <a:spcPts val="3920"/>
               </a:lnSpc>
               <a:spcBef>
                 <a:spcPct val="0"/>
               </a:spcBef>
             </a:pPr>
             <a:r>
-              <a:rPr lang="en-US" b="true" sz="3000">
+              <a:rPr lang="en-US" b="true" sz="2800">
                 <a:solidFill>
                   <a:srgbClr val="000000"/>
                 </a:solidFill>
@@ -9877,20 +9877,32 @@
                 <a:cs typeface="Open Sauce Bold"/>
                 <a:sym typeface="Open Sauce Bold"/>
               </a:rPr>
-              <a:t>n_original = 123 224 amendements</a:t>
+              <a:t>df_original </a:t>
+            </a:r>
+            <a:r>
+              <a:rPr lang="en-US" b="true" sz="2800">
+                <a:solidFill>
+                  <a:srgbClr val="000000"/>
+                </a:solidFill>
+                <a:latin typeface="Open Sauce Bold"/>
+                <a:ea typeface="Open Sauce Bold"/>
+                <a:cs typeface="Open Sauce Bold"/>
+                <a:sym typeface="Open Sauce Bold"/>
+              </a:rPr>
+              <a:t>= 123 224 amendements x 25 col</a:t>
             </a:r>
           </a:p>
           <a:p>
             <a:pPr algn="l">
               <a:lnSpc>
-                <a:spcPts val="4200"/>
+                <a:spcPts val="3920"/>
               </a:lnSpc>
               <a:spcBef>
                 <a:spcPct val="0"/>
               </a:spcBef>
             </a:pPr>
             <a:r>
-              <a:rPr lang="en-US" b="true" sz="3000">
+              <a:rPr lang="en-US" b="true" sz="2800">
                 <a:solidFill>
                   <a:srgbClr val="000000"/>
                 </a:solidFill>
@@ -9899,7 +9911,7 @@
                 <a:cs typeface="Open Sauce Bold"/>
                 <a:sym typeface="Open Sauce Bold"/>
               </a:rPr>
-              <a:t>n_clean = 65 388 amendements </a:t>
+              <a:t>df_clean = 65 388 amendements x 2 col</a:t>
             </a:r>
           </a:p>
         </p:txBody>
@@ -10234,7 +10246,7 @@
         </p:nvSpPr>
         <p:spPr>
           <a:xfrm rot="0">
-            <a:off x="10627001" y="7773858"/>
+            <a:off x="10753687" y="7503265"/>
             <a:ext cx="3178032" cy="422275"/>
           </a:xfrm>
           <a:prstGeom prst="rect">
@@ -10278,7 +10290,7 @@
         </p:nvSpPr>
         <p:spPr>
           <a:xfrm rot="0">
-            <a:off x="13649134" y="7773858"/>
+            <a:off x="13775820" y="7503265"/>
             <a:ext cx="3178032" cy="422275"/>
           </a:xfrm>
           <a:prstGeom prst="rect">
@@ -10314,6 +10326,203 @@
           </a:p>
         </p:txBody>
       </p:sp>
+      <p:grpSp>
+        <p:nvGrpSpPr>
+          <p:cNvPr name="Group 17" id="17"/>
+          <p:cNvGrpSpPr/>
+          <p:nvPr/>
+        </p:nvGrpSpPr>
+        <p:grpSpPr>
+          <a:xfrm rot="0">
+            <a:off x="14013185" y="8413750"/>
+            <a:ext cx="2940667" cy="638903"/>
+            <a:chOff x="0" y="0"/>
+            <a:chExt cx="3920889" cy="851871"/>
+          </a:xfrm>
+        </p:grpSpPr>
+        <p:sp>
+          <p:nvSpPr>
+            <p:cNvPr name="Freeform 18" id="18"/>
+            <p:cNvSpPr/>
+            <p:nvPr/>
+          </p:nvSpPr>
+          <p:spPr>
+            <a:xfrm flipH="false" flipV="false" rot="0">
+              <a:off x="0" y="0"/>
+              <a:ext cx="1277407" cy="851871"/>
+            </a:xfrm>
+            <a:custGeom>
+              <a:avLst/>
+              <a:gdLst/>
+              <a:ahLst/>
+              <a:cxnLst/>
+              <a:rect r="r" b="b" t="t" l="l"/>
+              <a:pathLst>
+                <a:path h="851871" w="1277407">
+                  <a:moveTo>
+                    <a:pt x="0" y="0"/>
+                  </a:moveTo>
+                  <a:lnTo>
+                    <a:pt x="1277407" y="0"/>
+                  </a:lnTo>
+                  <a:lnTo>
+                    <a:pt x="1277407" y="851871"/>
+                  </a:lnTo>
+                  <a:lnTo>
+                    <a:pt x="0" y="851871"/>
+                  </a:lnTo>
+                  <a:lnTo>
+                    <a:pt x="0" y="0"/>
+                  </a:lnTo>
+                  <a:close/>
+                </a:path>
+              </a:pathLst>
+            </a:custGeom>
+            <a:blipFill>
+              <a:blip r:embed="rId4"/>
+              <a:stretch>
+                <a:fillRect l="0" t="0" r="0" b="0"/>
+              </a:stretch>
+            </a:blipFill>
+          </p:spPr>
+        </p:sp>
+        <p:sp>
+          <p:nvSpPr>
+            <p:cNvPr name="Freeform 19" id="19"/>
+            <p:cNvSpPr/>
+            <p:nvPr/>
+          </p:nvSpPr>
+          <p:spPr>
+            <a:xfrm flipH="false" flipV="false" rot="0">
+              <a:off x="1001232" y="103597"/>
+              <a:ext cx="1330264" cy="748274"/>
+            </a:xfrm>
+            <a:custGeom>
+              <a:avLst/>
+              <a:gdLst/>
+              <a:ahLst/>
+              <a:cxnLst/>
+              <a:rect r="r" b="b" t="t" l="l"/>
+              <a:pathLst>
+                <a:path h="748274" w="1330264">
+                  <a:moveTo>
+                    <a:pt x="0" y="0"/>
+                  </a:moveTo>
+                  <a:lnTo>
+                    <a:pt x="1330264" y="0"/>
+                  </a:lnTo>
+                  <a:lnTo>
+                    <a:pt x="1330264" y="748274"/>
+                  </a:lnTo>
+                  <a:lnTo>
+                    <a:pt x="0" y="748274"/>
+                  </a:lnTo>
+                  <a:lnTo>
+                    <a:pt x="0" y="0"/>
+                  </a:lnTo>
+                  <a:close/>
+                </a:path>
+              </a:pathLst>
+            </a:custGeom>
+            <a:blipFill>
+              <a:blip r:embed="rId5"/>
+              <a:stretch>
+                <a:fillRect l="0" t="0" r="0" b="0"/>
+              </a:stretch>
+            </a:blipFill>
+          </p:spPr>
+        </p:sp>
+        <p:sp>
+          <p:nvSpPr>
+            <p:cNvPr name="Freeform 20" id="20"/>
+            <p:cNvSpPr/>
+            <p:nvPr/>
+          </p:nvSpPr>
+          <p:spPr>
+            <a:xfrm flipH="false" flipV="false" rot="0">
+              <a:off x="2331496" y="69056"/>
+              <a:ext cx="688815" cy="782815"/>
+            </a:xfrm>
+            <a:custGeom>
+              <a:avLst/>
+              <a:gdLst/>
+              <a:ahLst/>
+              <a:cxnLst/>
+              <a:rect r="r" b="b" t="t" l="l"/>
+              <a:pathLst>
+                <a:path h="782815" w="688815">
+                  <a:moveTo>
+                    <a:pt x="0" y="0"/>
+                  </a:moveTo>
+                  <a:lnTo>
+                    <a:pt x="688816" y="0"/>
+                  </a:lnTo>
+                  <a:lnTo>
+                    <a:pt x="688816" y="782815"/>
+                  </a:lnTo>
+                  <a:lnTo>
+                    <a:pt x="0" y="782815"/>
+                  </a:lnTo>
+                  <a:lnTo>
+                    <a:pt x="0" y="0"/>
+                  </a:lnTo>
+                  <a:close/>
+                </a:path>
+              </a:pathLst>
+            </a:custGeom>
+            <a:blipFill>
+              <a:blip r:embed="rId6"/>
+              <a:stretch>
+                <a:fillRect l="0" t="0" r="0" b="0"/>
+              </a:stretch>
+            </a:blipFill>
+          </p:spPr>
+        </p:sp>
+        <p:sp>
+          <p:nvSpPr>
+            <p:cNvPr name="TextBox 21" id="21"/>
+            <p:cNvSpPr txBox="true"/>
+            <p:nvPr/>
+          </p:nvSpPr>
+          <p:spPr>
+            <a:xfrm rot="0">
+              <a:off x="3020312" y="384337"/>
+              <a:ext cx="900577" cy="467534"/>
+            </a:xfrm>
+            <a:prstGeom prst="rect">
+              <a:avLst/>
+            </a:prstGeom>
+          </p:spPr>
+          <p:txBody>
+            <a:bodyPr anchor="t" rtlCol="false" tIns="0" lIns="0" bIns="0" rIns="0">
+              <a:spAutoFit/>
+            </a:bodyPr>
+            <a:lstStyle/>
+            <a:p>
+              <a:pPr algn="ctr">
+                <a:lnSpc>
+                  <a:spcPts val="3088"/>
+                </a:lnSpc>
+                <a:spcBef>
+                  <a:spcPct val="0"/>
+                </a:spcBef>
+              </a:pPr>
+              <a:r>
+                <a:rPr lang="en-US" sz="2206">
+                  <a:solidFill>
+                    <a:srgbClr val="000000"/>
+                  </a:solidFill>
+                  <a:latin typeface="Open Sauce"/>
+                  <a:ea typeface="Open Sauce"/>
+                  <a:cs typeface="Open Sauce"/>
+                  <a:sym typeface="Open Sauce"/>
+                </a:rPr>
+                <a:t>...</a:t>
+              </a:r>
+            </a:p>
+          </p:txBody>
+        </p:sp>
+      </p:grpSp>
     </p:spTree>
   </p:cSld>
   <p:clrMapOvr>
